--- a/word-drafts/figures/Generators-Fig1-Composition.pptx
+++ b/word-drafts/figures/Generators-Fig1-Composition.pptx
@@ -4248,7 +4248,7 @@
         <p:spPr>
           <a:xfrm>
             <a:off x="4595812" y="1228725"/>
-            <a:ext cx="952500" cy="123825"/>
+            <a:ext cx="1190625" cy="123825"/>
           </a:xfrm>
           <a:prstGeom prst="rect">
             <a:avLst/>
@@ -4319,7 +4319,7 @@
         <p:spPr>
           <a:xfrm>
             <a:off x="5881687" y="1228725"/>
-            <a:ext cx="1371600" cy="123825"/>
+            <a:ext cx="1752600" cy="123825"/>
           </a:xfrm>
           <a:prstGeom prst="rect">
             <a:avLst/>
@@ -4466,7 +4466,7 @@
         <p:spPr>
           <a:xfrm>
             <a:off x="7167562" y="1371600"/>
-            <a:ext cx="600075" cy="123825"/>
+            <a:ext cx="742950" cy="123825"/>
           </a:xfrm>
           <a:prstGeom prst="rect">
             <a:avLst/>
@@ -4537,7 +4537,7 @@
         <p:spPr>
           <a:xfrm>
             <a:off x="8453437" y="1228725"/>
-            <a:ext cx="628650" cy="123825"/>
+            <a:ext cx="771525" cy="123825"/>
           </a:xfrm>
           <a:prstGeom prst="rect">
             <a:avLst/>
@@ -4912,7 +4912,7 @@
         <p:spPr>
           <a:xfrm>
             <a:off x="9096375" y="3400425"/>
-            <a:ext cx="514350" cy="123825"/>
+            <a:ext cx="657225" cy="123825"/>
           </a:xfrm>
           <a:prstGeom prst="rect">
             <a:avLst/>
@@ -4983,7 +4983,7 @@
         <p:spPr>
           <a:xfrm>
             <a:off x="10382250" y="3400425"/>
-            <a:ext cx="590550" cy="123825"/>
+            <a:ext cx="723900" cy="123825"/>
           </a:xfrm>
           <a:prstGeom prst="rect">
             <a:avLst/>
@@ -5169,7 +5169,7 @@
         <p:spPr>
           <a:xfrm>
             <a:off x="7810500" y="2314575"/>
-            <a:ext cx="600075" cy="123825"/>
+            <a:ext cx="790575" cy="123825"/>
           </a:xfrm>
           <a:prstGeom prst="rect">
             <a:avLst/>
